--- a/lessons/14_Model_building/images/cross_val_slides.pptx
+++ b/lessons/14_Model_building/images/cross_val_slides.pptx
@@ -6,7 +6,8 @@
   </p:sldMasterIdLst>
   <p:sldIdLst>
     <p:sldId id="256" r:id="rId2"/>
-    <p:sldId id="257" r:id="rId3"/>
+    <p:sldId id="258" r:id="rId3"/>
+    <p:sldId id="257" r:id="rId4"/>
   </p:sldIdLst>
   <p:sldSz cx="12192000" cy="6858000"/>
   <p:notesSz cx="6858000" cy="9144000"/>
@@ -105,7 +106,73 @@
       </a:defRPr>
     </a:lvl9pPr>
   </p:defaultTextStyle>
+  <p:extLst>
+    <p:ext uri="{EFAFB233-063F-42B5-8137-9DF3F51BA10A}">
+      <p15:sldGuideLst xmlns:p15="http://schemas.microsoft.com/office/powerpoint/2012/main"/>
+    </p:ext>
+  </p:extLst>
 </p:presentation>
+</file>
+
+<file path=ppt/revisionInfo.xml><?xml version="1.0" encoding="utf-8"?>
+<p1510:revInfo xmlns:a="http://schemas.openxmlformats.org/drawingml/2006/main" xmlns:r="http://schemas.openxmlformats.org/officeDocument/2006/relationships" xmlns:p1510="http://schemas.microsoft.com/office/powerpoint/2015/10/main">
+  <p1510:revLst>
+    <p1510:client id="{5BF3003F-187D-7A43-8294-E949D58F2072}" v="3" dt="2025-05-13T16:39:46.113"/>
+  </p1510:revLst>
+</p1510:revInfo>
+</file>
+
+<file path=ppt/changesInfos/changesInfo1.xml><?xml version="1.0" encoding="utf-8"?>
+<pc:chgInfo xmlns:a="http://schemas.openxmlformats.org/drawingml/2006/main" xmlns:r="http://schemas.openxmlformats.org/officeDocument/2006/relationships" xmlns:ac="http://schemas.microsoft.com/office/drawing/2013/main/command" xmlns:pc="http://schemas.microsoft.com/office/powerpoint/2013/main/command">
+  <pc:docChgLst>
+    <pc:chgData name="Nicky Wakim" userId="63a62853-8dd4-431b-8872-ecc2181a70d8" providerId="ADAL" clId="{5BF3003F-187D-7A43-8294-E949D58F2072}"/>
+    <pc:docChg chg="undo custSel addSld modSld">
+      <pc:chgData name="Nicky Wakim" userId="63a62853-8dd4-431b-8872-ecc2181a70d8" providerId="ADAL" clId="{5BF3003F-187D-7A43-8294-E949D58F2072}" dt="2025-05-13T16:39:46.113" v="40" actId="164"/>
+      <pc:docMkLst>
+        <pc:docMk/>
+      </pc:docMkLst>
+      <pc:sldChg chg="addSp modSp new mod">
+        <pc:chgData name="Nicky Wakim" userId="63a62853-8dd4-431b-8872-ecc2181a70d8" providerId="ADAL" clId="{5BF3003F-187D-7A43-8294-E949D58F2072}" dt="2025-05-13T16:39:46.113" v="40" actId="164"/>
+        <pc:sldMkLst>
+          <pc:docMk/>
+          <pc:sldMk cId="34324992" sldId="258"/>
+        </pc:sldMkLst>
+        <pc:spChg chg="add mod">
+          <ac:chgData name="Nicky Wakim" userId="63a62853-8dd4-431b-8872-ecc2181a70d8" providerId="ADAL" clId="{5BF3003F-187D-7A43-8294-E949D58F2072}" dt="2025-05-13T16:39:46.113" v="40" actId="164"/>
+          <ac:spMkLst>
+            <pc:docMk/>
+            <pc:sldMk cId="34324992" sldId="258"/>
+            <ac:spMk id="2" creationId="{05C76F66-26C2-D977-AC2B-674240CFA457}"/>
+          </ac:spMkLst>
+        </pc:spChg>
+        <pc:spChg chg="add mod">
+          <ac:chgData name="Nicky Wakim" userId="63a62853-8dd4-431b-8872-ecc2181a70d8" providerId="ADAL" clId="{5BF3003F-187D-7A43-8294-E949D58F2072}" dt="2025-05-13T16:39:46.113" v="40" actId="164"/>
+          <ac:spMkLst>
+            <pc:docMk/>
+            <pc:sldMk cId="34324992" sldId="258"/>
+            <ac:spMk id="3" creationId="{960A045C-7A7A-52B3-EDC8-4269DB7FF60A}"/>
+          </ac:spMkLst>
+        </pc:spChg>
+        <pc:spChg chg="add mod">
+          <ac:chgData name="Nicky Wakim" userId="63a62853-8dd4-431b-8872-ecc2181a70d8" providerId="ADAL" clId="{5BF3003F-187D-7A43-8294-E949D58F2072}" dt="2025-05-13T16:39:46.113" v="40" actId="164"/>
+          <ac:spMkLst>
+            <pc:docMk/>
+            <pc:sldMk cId="34324992" sldId="258"/>
+            <ac:spMk id="4" creationId="{CA0CF8E4-D3DA-3949-644E-A752A4DB392B}"/>
+          </ac:spMkLst>
+        </pc:spChg>
+        <pc:grpChg chg="add mod">
+          <ac:chgData name="Nicky Wakim" userId="63a62853-8dd4-431b-8872-ecc2181a70d8" providerId="ADAL" clId="{5BF3003F-187D-7A43-8294-E949D58F2072}" dt="2025-05-13T16:39:46.113" v="40" actId="164"/>
+          <ac:grpSpMkLst>
+            <pc:docMk/>
+            <pc:sldMk cId="34324992" sldId="258"/>
+            <ac:grpSpMk id="5" creationId="{1719A394-712B-97AF-A739-9BC844D26BBA}"/>
+          </ac:grpSpMkLst>
+        </pc:grpChg>
+      </pc:sldChg>
+    </pc:docChg>
+  </pc:docChgLst>
+</pc:chgInfo>
 </file>
 
 <file path=ppt/slideLayouts/slideLayout1.xml><?xml version="1.0" encoding="utf-8"?>
@@ -255,7 +322,7 @@
           <a:p>
             <a:fld id="{C44BA0D8-31E5-9A45-AE89-8C99497D0F03}" type="datetimeFigureOut">
               <a:rPr lang="en-US" smtClean="0"/>
-              <a:t>5/21/24</a:t>
+              <a:t>5/13/25</a:t>
             </a:fld>
             <a:endParaRPr lang="en-US"/>
           </a:p>
@@ -453,7 +520,7 @@
           <a:p>
             <a:fld id="{C44BA0D8-31E5-9A45-AE89-8C99497D0F03}" type="datetimeFigureOut">
               <a:rPr lang="en-US" smtClean="0"/>
-              <a:t>5/21/24</a:t>
+              <a:t>5/13/25</a:t>
             </a:fld>
             <a:endParaRPr lang="en-US"/>
           </a:p>
@@ -661,7 +728,7 @@
           <a:p>
             <a:fld id="{C44BA0D8-31E5-9A45-AE89-8C99497D0F03}" type="datetimeFigureOut">
               <a:rPr lang="en-US" smtClean="0"/>
-              <a:t>5/21/24</a:t>
+              <a:t>5/13/25</a:t>
             </a:fld>
             <a:endParaRPr lang="en-US"/>
           </a:p>
@@ -859,7 +926,7 @@
           <a:p>
             <a:fld id="{C44BA0D8-31E5-9A45-AE89-8C99497D0F03}" type="datetimeFigureOut">
               <a:rPr lang="en-US" smtClean="0"/>
-              <a:t>5/21/24</a:t>
+              <a:t>5/13/25</a:t>
             </a:fld>
             <a:endParaRPr lang="en-US"/>
           </a:p>
@@ -1134,7 +1201,7 @@
           <a:p>
             <a:fld id="{C44BA0D8-31E5-9A45-AE89-8C99497D0F03}" type="datetimeFigureOut">
               <a:rPr lang="en-US" smtClean="0"/>
-              <a:t>5/21/24</a:t>
+              <a:t>5/13/25</a:t>
             </a:fld>
             <a:endParaRPr lang="en-US"/>
           </a:p>
@@ -1399,7 +1466,7 @@
           <a:p>
             <a:fld id="{C44BA0D8-31E5-9A45-AE89-8C99497D0F03}" type="datetimeFigureOut">
               <a:rPr lang="en-US" smtClean="0"/>
-              <a:t>5/21/24</a:t>
+              <a:t>5/13/25</a:t>
             </a:fld>
             <a:endParaRPr lang="en-US"/>
           </a:p>
@@ -1811,7 +1878,7 @@
           <a:p>
             <a:fld id="{C44BA0D8-31E5-9A45-AE89-8C99497D0F03}" type="datetimeFigureOut">
               <a:rPr lang="en-US" smtClean="0"/>
-              <a:t>5/21/24</a:t>
+              <a:t>5/13/25</a:t>
             </a:fld>
             <a:endParaRPr lang="en-US"/>
           </a:p>
@@ -1952,7 +2019,7 @@
           <a:p>
             <a:fld id="{C44BA0D8-31E5-9A45-AE89-8C99497D0F03}" type="datetimeFigureOut">
               <a:rPr lang="en-US" smtClean="0"/>
-              <a:t>5/21/24</a:t>
+              <a:t>5/13/25</a:t>
             </a:fld>
             <a:endParaRPr lang="en-US"/>
           </a:p>
@@ -2065,7 +2132,7 @@
           <a:p>
             <a:fld id="{C44BA0D8-31E5-9A45-AE89-8C99497D0F03}" type="datetimeFigureOut">
               <a:rPr lang="en-US" smtClean="0"/>
-              <a:t>5/21/24</a:t>
+              <a:t>5/13/25</a:t>
             </a:fld>
             <a:endParaRPr lang="en-US"/>
           </a:p>
@@ -2376,7 +2443,7 @@
           <a:p>
             <a:fld id="{C44BA0D8-31E5-9A45-AE89-8C99497D0F03}" type="datetimeFigureOut">
               <a:rPr lang="en-US" smtClean="0"/>
-              <a:t>5/21/24</a:t>
+              <a:t>5/13/25</a:t>
             </a:fld>
             <a:endParaRPr lang="en-US"/>
           </a:p>
@@ -2664,7 +2731,7 @@
           <a:p>
             <a:fld id="{C44BA0D8-31E5-9A45-AE89-8C99497D0F03}" type="datetimeFigureOut">
               <a:rPr lang="en-US" smtClean="0"/>
-              <a:t>5/21/24</a:t>
+              <a:t>5/13/25</a:t>
             </a:fld>
             <a:endParaRPr lang="en-US"/>
           </a:p>
@@ -2905,7 +2972,7 @@
           <a:p>
             <a:fld id="{C44BA0D8-31E5-9A45-AE89-8C99497D0F03}" type="datetimeFigureOut">
               <a:rPr lang="en-US" smtClean="0"/>
-              <a:t>5/21/24</a:t>
+              <a:t>5/13/25</a:t>
             </a:fld>
             <a:endParaRPr lang="en-US"/>
           </a:p>
@@ -3386,6 +3453,234 @@
 </file>
 
 <file path=ppt/slides/slide2.xml><?xml version="1.0" encoding="utf-8"?>
+<p:sld xmlns:a="http://schemas.openxmlformats.org/drawingml/2006/main" xmlns:r="http://schemas.openxmlformats.org/officeDocument/2006/relationships" xmlns:p="http://schemas.openxmlformats.org/presentationml/2006/main">
+  <p:cSld>
+    <p:spTree>
+      <p:nvGrpSpPr>
+        <p:cNvPr id="1" name=""/>
+        <p:cNvGrpSpPr/>
+        <p:nvPr/>
+      </p:nvGrpSpPr>
+      <p:grpSpPr>
+        <a:xfrm>
+          <a:off x="0" y="0"/>
+          <a:ext cx="0" cy="0"/>
+          <a:chOff x="0" y="0"/>
+          <a:chExt cx="0" cy="0"/>
+        </a:xfrm>
+      </p:grpSpPr>
+      <p:grpSp>
+        <p:nvGrpSpPr>
+          <p:cNvPr id="5" name="Group 4">
+            <a:extLst>
+              <a:ext uri="{FF2B5EF4-FFF2-40B4-BE49-F238E27FC236}">
+                <a16:creationId xmlns:a16="http://schemas.microsoft.com/office/drawing/2014/main" id="{1719A394-712B-97AF-A739-9BC844D26BBA}"/>
+              </a:ext>
+            </a:extLst>
+          </p:cNvPr>
+          <p:cNvGrpSpPr/>
+          <p:nvPr/>
+        </p:nvGrpSpPr>
+        <p:grpSpPr>
+          <a:xfrm>
+            <a:off x="1434195" y="395149"/>
+            <a:ext cx="2974520" cy="1426029"/>
+            <a:chOff x="1434195" y="395149"/>
+            <a:chExt cx="2974520" cy="1426029"/>
+          </a:xfrm>
+        </p:grpSpPr>
+        <p:sp>
+          <p:nvSpPr>
+            <p:cNvPr id="2" name="Rectangle 1">
+              <a:extLst>
+                <a:ext uri="{FF2B5EF4-FFF2-40B4-BE49-F238E27FC236}">
+                  <a16:creationId xmlns:a16="http://schemas.microsoft.com/office/drawing/2014/main" id="{05C76F66-26C2-D977-AC2B-674240CFA457}"/>
+                </a:ext>
+              </a:extLst>
+            </p:cNvPr>
+            <p:cNvSpPr/>
+            <p:nvPr/>
+          </p:nvSpPr>
+          <p:spPr>
+            <a:xfrm>
+              <a:off x="1434196" y="1178921"/>
+              <a:ext cx="1809747" cy="642257"/>
+            </a:xfrm>
+            <a:prstGeom prst="rect">
+              <a:avLst/>
+            </a:prstGeom>
+            <a:solidFill>
+              <a:schemeClr val="accent5"/>
+            </a:solidFill>
+            <a:ln>
+              <a:solidFill>
+                <a:schemeClr val="accent5"/>
+              </a:solidFill>
+            </a:ln>
+          </p:spPr>
+          <p:style>
+            <a:lnRef idx="2">
+              <a:schemeClr val="accent1">
+                <a:shade val="15000"/>
+              </a:schemeClr>
+            </a:lnRef>
+            <a:fillRef idx="1">
+              <a:schemeClr val="accent1"/>
+            </a:fillRef>
+            <a:effectRef idx="0">
+              <a:schemeClr val="accent1"/>
+            </a:effectRef>
+            <a:fontRef idx="minor">
+              <a:schemeClr val="lt1"/>
+            </a:fontRef>
+          </p:style>
+          <p:txBody>
+            <a:bodyPr rtlCol="0" anchor="ctr"/>
+            <a:lstStyle/>
+            <a:p>
+              <a:pPr algn="ctr"/>
+              <a:r>
+                <a:rPr lang="en-US" sz="2000" dirty="0">
+                  <a:latin typeface="Lato" panose="020F0502020204030203" pitchFamily="34" charset="77"/>
+                </a:rPr>
+                <a:t>training set</a:t>
+              </a:r>
+            </a:p>
+          </p:txBody>
+        </p:sp>
+        <p:sp>
+          <p:nvSpPr>
+            <p:cNvPr id="3" name="Rectangle 2">
+              <a:extLst>
+                <a:ext uri="{FF2B5EF4-FFF2-40B4-BE49-F238E27FC236}">
+                  <a16:creationId xmlns:a16="http://schemas.microsoft.com/office/drawing/2014/main" id="{960A045C-7A7A-52B3-EDC8-4269DB7FF60A}"/>
+                </a:ext>
+              </a:extLst>
+            </p:cNvPr>
+            <p:cNvSpPr/>
+            <p:nvPr/>
+          </p:nvSpPr>
+          <p:spPr>
+            <a:xfrm>
+              <a:off x="3360969" y="1178920"/>
+              <a:ext cx="1047746" cy="642257"/>
+            </a:xfrm>
+            <a:prstGeom prst="rect">
+              <a:avLst/>
+            </a:prstGeom>
+            <a:solidFill>
+              <a:schemeClr val="accent6"/>
+            </a:solidFill>
+            <a:ln>
+              <a:solidFill>
+                <a:schemeClr val="accent6"/>
+              </a:solidFill>
+            </a:ln>
+          </p:spPr>
+          <p:style>
+            <a:lnRef idx="2">
+              <a:schemeClr val="accent1">
+                <a:shade val="15000"/>
+              </a:schemeClr>
+            </a:lnRef>
+            <a:fillRef idx="1">
+              <a:schemeClr val="accent1"/>
+            </a:fillRef>
+            <a:effectRef idx="0">
+              <a:schemeClr val="accent1"/>
+            </a:effectRef>
+            <a:fontRef idx="minor">
+              <a:schemeClr val="lt1"/>
+            </a:fontRef>
+          </p:style>
+          <p:txBody>
+            <a:bodyPr rtlCol="0" anchor="ctr"/>
+            <a:lstStyle/>
+            <a:p>
+              <a:pPr algn="ctr"/>
+              <a:r>
+                <a:rPr lang="en-US" sz="2000" dirty="0">
+                  <a:latin typeface="Lato" panose="020F0502020204030203" pitchFamily="34" charset="77"/>
+                </a:rPr>
+                <a:t>testing set</a:t>
+              </a:r>
+            </a:p>
+          </p:txBody>
+        </p:sp>
+        <p:sp>
+          <p:nvSpPr>
+            <p:cNvPr id="4" name="Rectangle 3">
+              <a:extLst>
+                <a:ext uri="{FF2B5EF4-FFF2-40B4-BE49-F238E27FC236}">
+                  <a16:creationId xmlns:a16="http://schemas.microsoft.com/office/drawing/2014/main" id="{CA0CF8E4-D3DA-3949-644E-A752A4DB392B}"/>
+                </a:ext>
+              </a:extLst>
+            </p:cNvPr>
+            <p:cNvSpPr/>
+            <p:nvPr/>
+          </p:nvSpPr>
+          <p:spPr>
+            <a:xfrm>
+              <a:off x="1434195" y="395149"/>
+              <a:ext cx="2974519" cy="642257"/>
+            </a:xfrm>
+            <a:prstGeom prst="rect">
+              <a:avLst/>
+            </a:prstGeom>
+            <a:solidFill>
+              <a:srgbClr val="D7265F"/>
+            </a:solidFill>
+            <a:ln>
+              <a:solidFill>
+                <a:srgbClr val="D7265F"/>
+              </a:solidFill>
+            </a:ln>
+          </p:spPr>
+          <p:style>
+            <a:lnRef idx="2">
+              <a:schemeClr val="accent1">
+                <a:shade val="15000"/>
+              </a:schemeClr>
+            </a:lnRef>
+            <a:fillRef idx="1">
+              <a:schemeClr val="accent1"/>
+            </a:fillRef>
+            <a:effectRef idx="0">
+              <a:schemeClr val="accent1"/>
+            </a:effectRef>
+            <a:fontRef idx="minor">
+              <a:schemeClr val="lt1"/>
+            </a:fontRef>
+          </p:style>
+          <p:txBody>
+            <a:bodyPr rtlCol="0" anchor="ctr"/>
+            <a:lstStyle/>
+            <a:p>
+              <a:pPr algn="ctr"/>
+              <a:r>
+                <a:rPr lang="en-US" sz="2000" dirty="0">
+                  <a:latin typeface="Lato" panose="020F0502020204030203" pitchFamily="34" charset="77"/>
+                </a:rPr>
+                <a:t>dataset</a:t>
+              </a:r>
+            </a:p>
+          </p:txBody>
+        </p:sp>
+      </p:grpSp>
+    </p:spTree>
+    <p:extLst>
+      <p:ext uri="{BB962C8B-B14F-4D97-AF65-F5344CB8AC3E}">
+        <p14:creationId xmlns:p14="http://schemas.microsoft.com/office/powerpoint/2010/main" val="34324992"/>
+      </p:ext>
+    </p:extLst>
+  </p:cSld>
+  <p:clrMapOvr>
+    <a:masterClrMapping/>
+  </p:clrMapOvr>
+</p:sld>
+</file>
+
+<file path=ppt/slides/slide3.xml><?xml version="1.0" encoding="utf-8"?>
 <p:sld xmlns:a="http://schemas.openxmlformats.org/drawingml/2006/main" xmlns:r="http://schemas.openxmlformats.org/officeDocument/2006/relationships" xmlns:p="http://schemas.openxmlformats.org/presentationml/2006/main">
   <p:cSld>
     <p:spTree>
